--- a/docs/pictures/Education.pptx
+++ b/docs/pictures/Education.pptx
@@ -5,13 +5,15 @@
     <p:sldMasterId id="2147483648" r:id="rId1"/>
   </p:sldMasterIdLst>
   <p:notesMasterIdLst>
-    <p:notesMasterId r:id="rId6"/>
+    <p:notesMasterId r:id="rId8"/>
   </p:notesMasterIdLst>
   <p:sldIdLst>
     <p:sldId id="256" r:id="rId2"/>
     <p:sldId id="257" r:id="rId3"/>
     <p:sldId id="258" r:id="rId4"/>
     <p:sldId id="259" r:id="rId5"/>
+    <p:sldId id="260" r:id="rId6"/>
+    <p:sldId id="261" r:id="rId7"/>
   </p:sldIdLst>
   <p:sldSz cx="12192000" cy="6858000"/>
   <p:notesSz cx="6858000" cy="9144000"/>
@@ -121,7 +123,7 @@
 <file path=ppt/revisionInfo.xml><?xml version="1.0" encoding="utf-8"?>
 <p1510:revInfo xmlns:a="http://schemas.openxmlformats.org/drawingml/2006/main" xmlns:r="http://schemas.openxmlformats.org/officeDocument/2006/relationships" xmlns:p1510="http://schemas.microsoft.com/office/powerpoint/2015/10/main">
   <p1510:revLst>
-    <p1510:client id="{8F180AF8-0B32-494C-B77F-4F4C649DF3AE}" v="12" dt="2026-02-22T08:50:34.302"/>
+    <p1510:client id="{8F180AF8-0B32-494C-B77F-4F4C649DF3AE}" v="32" dt="2026-03-05T10:31:05.811"/>
   </p1510:revLst>
 </p1510:revInfo>
 </file>
@@ -131,7 +133,7 @@
   <pc:docChgLst>
     <pc:chgData name="Yan, Hongrui" userId="08bcad00-300c-4922-94f4-b780c0ab1a9c" providerId="ADAL" clId="{748A0DB9-C178-483D-A9CC-9D8C85EBC1EA}"/>
     <pc:docChg chg="undo custSel addSld modSld">
-      <pc:chgData name="Yan, Hongrui" userId="08bcad00-300c-4922-94f4-b780c0ab1a9c" providerId="ADAL" clId="{748A0DB9-C178-483D-A9CC-9D8C85EBC1EA}" dt="2026-02-22T08:51:07.324" v="362" actId="478"/>
+      <pc:chgData name="Yan, Hongrui" userId="08bcad00-300c-4922-94f4-b780c0ab1a9c" providerId="ADAL" clId="{748A0DB9-C178-483D-A9CC-9D8C85EBC1EA}" dt="2026-03-05T10:31:30.997" v="567" actId="693"/>
       <pc:docMkLst>
         <pc:docMk/>
       </pc:docMkLst>
@@ -258,38 +260,6 @@
           <pc:docMk/>
           <pc:sldMk cId="1233551501" sldId="259"/>
         </pc:sldMkLst>
-        <pc:spChg chg="del">
-          <ac:chgData name="Yan, Hongrui" userId="08bcad00-300c-4922-94f4-b780c0ab1a9c" providerId="ADAL" clId="{748A0DB9-C178-483D-A9CC-9D8C85EBC1EA}" dt="2026-02-22T08:36:19.096" v="156" actId="478"/>
-          <ac:spMkLst>
-            <pc:docMk/>
-            <pc:sldMk cId="1233551501" sldId="259"/>
-            <ac:spMk id="2" creationId="{752EEDD0-C98A-EC02-5169-79CFA6A613DF}"/>
-          </ac:spMkLst>
-        </pc:spChg>
-        <pc:spChg chg="del">
-          <ac:chgData name="Yan, Hongrui" userId="08bcad00-300c-4922-94f4-b780c0ab1a9c" providerId="ADAL" clId="{748A0DB9-C178-483D-A9CC-9D8C85EBC1EA}" dt="2026-02-22T08:36:19.492" v="157" actId="478"/>
-          <ac:spMkLst>
-            <pc:docMk/>
-            <pc:sldMk cId="1233551501" sldId="259"/>
-            <ac:spMk id="3" creationId="{8AC00C12-F9AA-2C07-1E06-E19C5D876A72}"/>
-          </ac:spMkLst>
-        </pc:spChg>
-        <pc:spChg chg="add del">
-          <ac:chgData name="Yan, Hongrui" userId="08bcad00-300c-4922-94f4-b780c0ab1a9c" providerId="ADAL" clId="{748A0DB9-C178-483D-A9CC-9D8C85EBC1EA}" dt="2026-02-22T08:44:20.345" v="176" actId="478"/>
-          <ac:spMkLst>
-            <pc:docMk/>
-            <pc:sldMk cId="1233551501" sldId="259"/>
-            <ac:spMk id="8" creationId="{197D464C-C679-D502-16BC-8100255F8485}"/>
-          </ac:spMkLst>
-        </pc:spChg>
-        <pc:spChg chg="add del">
-          <ac:chgData name="Yan, Hongrui" userId="08bcad00-300c-4922-94f4-b780c0ab1a9c" providerId="ADAL" clId="{748A0DB9-C178-483D-A9CC-9D8C85EBC1EA}" dt="2026-02-22T08:44:47.763" v="189" actId="11529"/>
-          <ac:spMkLst>
-            <pc:docMk/>
-            <pc:sldMk cId="1233551501" sldId="259"/>
-            <ac:spMk id="13" creationId="{21307EFC-7592-C1C4-21EA-7EDC283DA32D}"/>
-          </ac:spMkLst>
-        </pc:spChg>
         <pc:spChg chg="add mod">
           <ac:chgData name="Yan, Hongrui" userId="08bcad00-300c-4922-94f4-b780c0ab1a9c" providerId="ADAL" clId="{748A0DB9-C178-483D-A9CC-9D8C85EBC1EA}" dt="2026-02-22T08:50:24.046" v="354" actId="207"/>
           <ac:spMkLst>
@@ -306,22 +276,6 @@
             <ac:grpSpMk id="22" creationId="{6986E17F-DE29-3477-0F59-7E1C62ED3B77}"/>
           </ac:grpSpMkLst>
         </pc:grpChg>
-        <pc:picChg chg="add del mod modCrop">
-          <ac:chgData name="Yan, Hongrui" userId="08bcad00-300c-4922-94f4-b780c0ab1a9c" providerId="ADAL" clId="{748A0DB9-C178-483D-A9CC-9D8C85EBC1EA}" dt="2026-02-22T08:37:16.441" v="164" actId="478"/>
-          <ac:picMkLst>
-            <pc:docMk/>
-            <pc:sldMk cId="1233551501" sldId="259"/>
-            <ac:picMk id="5" creationId="{B7F0BAF3-5A86-1295-C5CB-B59A56158A2E}"/>
-          </ac:picMkLst>
-        </pc:picChg>
-        <pc:picChg chg="add del mod modCrop">
-          <ac:chgData name="Yan, Hongrui" userId="08bcad00-300c-4922-94f4-b780c0ab1a9c" providerId="ADAL" clId="{748A0DB9-C178-483D-A9CC-9D8C85EBC1EA}" dt="2026-02-22T08:44:19.016" v="175" actId="478"/>
-          <ac:picMkLst>
-            <pc:docMk/>
-            <pc:sldMk cId="1233551501" sldId="259"/>
-            <ac:picMk id="7" creationId="{4FE237C7-3DA9-B88D-C464-7B4CD5EC4FE0}"/>
-          </ac:picMkLst>
-        </pc:picChg>
         <pc:picChg chg="add mod modCrop">
           <ac:chgData name="Yan, Hongrui" userId="08bcad00-300c-4922-94f4-b780c0ab1a9c" providerId="ADAL" clId="{748A0DB9-C178-483D-A9CC-9D8C85EBC1EA}" dt="2026-02-22T08:45:50.489" v="326" actId="164"/>
           <ac:picMkLst>
@@ -338,14 +292,6 @@
             <ac:picMk id="24" creationId="{C3BFFFEB-5755-0F39-B872-040EB09D2ADA}"/>
           </ac:picMkLst>
         </pc:picChg>
-        <pc:cxnChg chg="add del">
-          <ac:chgData name="Yan, Hongrui" userId="08bcad00-300c-4922-94f4-b780c0ab1a9c" providerId="ADAL" clId="{748A0DB9-C178-483D-A9CC-9D8C85EBC1EA}" dt="2026-02-22T08:44:39.975" v="187" actId="11529"/>
-          <ac:cxnSpMkLst>
-            <pc:docMk/>
-            <pc:sldMk cId="1233551501" sldId="259"/>
-            <ac:cxnSpMk id="12" creationId="{16FCC9A5-B642-277F-78F5-E7B518A0D115}"/>
-          </ac:cxnSpMkLst>
-        </pc:cxnChg>
         <pc:cxnChg chg="add mod">
           <ac:chgData name="Yan, Hongrui" userId="08bcad00-300c-4922-94f4-b780c0ab1a9c" providerId="ADAL" clId="{748A0DB9-C178-483D-A9CC-9D8C85EBC1EA}" dt="2026-02-22T08:49:52.888" v="346" actId="208"/>
           <ac:cxnSpMkLst>
@@ -370,36 +316,12 @@
             <ac:cxnSpMk id="19" creationId="{BF980EB9-9842-6300-0466-30DBBEFC65C8}"/>
           </ac:cxnSpMkLst>
         </pc:cxnChg>
-        <pc:cxnChg chg="add del mod">
-          <ac:chgData name="Yan, Hongrui" userId="08bcad00-300c-4922-94f4-b780c0ab1a9c" providerId="ADAL" clId="{748A0DB9-C178-483D-A9CC-9D8C85EBC1EA}" dt="2026-02-22T08:51:07.324" v="362" actId="478"/>
-          <ac:cxnSpMkLst>
-            <pc:docMk/>
-            <pc:sldMk cId="1233551501" sldId="259"/>
-            <ac:cxnSpMk id="20" creationId="{93BF0719-5B6D-AA14-9AAD-E56BB143ED6C}"/>
-          </ac:cxnSpMkLst>
-        </pc:cxnChg>
         <pc:cxnChg chg="add mod">
           <ac:chgData name="Yan, Hongrui" userId="08bcad00-300c-4922-94f4-b780c0ab1a9c" providerId="ADAL" clId="{748A0DB9-C178-483D-A9CC-9D8C85EBC1EA}" dt="2026-02-22T08:49:47.555" v="345" actId="208"/>
           <ac:cxnSpMkLst>
             <pc:docMk/>
             <pc:sldMk cId="1233551501" sldId="259"/>
             <ac:cxnSpMk id="21" creationId="{4359FAD5-3A72-C6EE-CC1F-1B6745DA8536}"/>
-          </ac:cxnSpMkLst>
-        </pc:cxnChg>
-        <pc:cxnChg chg="add del">
-          <ac:chgData name="Yan, Hongrui" userId="08bcad00-300c-4922-94f4-b780c0ab1a9c" providerId="ADAL" clId="{748A0DB9-C178-483D-A9CC-9D8C85EBC1EA}" dt="2026-02-22T08:48:56.805" v="336" actId="11529"/>
-          <ac:cxnSpMkLst>
-            <pc:docMk/>
-            <pc:sldMk cId="1233551501" sldId="259"/>
-            <ac:cxnSpMk id="26" creationId="{FFD3AF2E-2B13-8C7C-DEA7-8B7CFD8CC7D0}"/>
-          </ac:cxnSpMkLst>
-        </pc:cxnChg>
-        <pc:cxnChg chg="add del">
-          <ac:chgData name="Yan, Hongrui" userId="08bcad00-300c-4922-94f4-b780c0ab1a9c" providerId="ADAL" clId="{748A0DB9-C178-483D-A9CC-9D8C85EBC1EA}" dt="2026-02-22T08:49:34.788" v="340" actId="11529"/>
-          <ac:cxnSpMkLst>
-            <pc:docMk/>
-            <pc:sldMk cId="1233551501" sldId="259"/>
-            <ac:cxnSpMk id="28" creationId="{C82F7225-0CC3-E7CF-4499-FB9E1C8324CF}"/>
           </ac:cxnSpMkLst>
         </pc:cxnChg>
         <pc:cxnChg chg="add mod">
@@ -424,6 +346,236 @@
             <pc:docMk/>
             <pc:sldMk cId="1233551501" sldId="259"/>
             <ac:cxnSpMk id="36" creationId="{7ADFE33B-6B62-3FA2-BFCA-ADBC1E19B109}"/>
+          </ac:cxnSpMkLst>
+        </pc:cxnChg>
+      </pc:sldChg>
+      <pc:sldChg chg="addSp delSp modSp new mod">
+        <pc:chgData name="Yan, Hongrui" userId="08bcad00-300c-4922-94f4-b780c0ab1a9c" providerId="ADAL" clId="{748A0DB9-C178-483D-A9CC-9D8C85EBC1EA}" dt="2026-03-05T08:28:54.255" v="471" actId="20577"/>
+        <pc:sldMkLst>
+          <pc:docMk/>
+          <pc:sldMk cId="1110711296" sldId="260"/>
+        </pc:sldMkLst>
+        <pc:spChg chg="del">
+          <ac:chgData name="Yan, Hongrui" userId="08bcad00-300c-4922-94f4-b780c0ab1a9c" providerId="ADAL" clId="{748A0DB9-C178-483D-A9CC-9D8C85EBC1EA}" dt="2026-03-05T08:11:58.485" v="364" actId="478"/>
+          <ac:spMkLst>
+            <pc:docMk/>
+            <pc:sldMk cId="1110711296" sldId="260"/>
+            <ac:spMk id="2" creationId="{76D66B81-624C-4B8D-4626-24468206EDBB}"/>
+          </ac:spMkLst>
+        </pc:spChg>
+        <pc:spChg chg="del">
+          <ac:chgData name="Yan, Hongrui" userId="08bcad00-300c-4922-94f4-b780c0ab1a9c" providerId="ADAL" clId="{748A0DB9-C178-483D-A9CC-9D8C85EBC1EA}" dt="2026-03-05T08:11:59.139" v="365" actId="478"/>
+          <ac:spMkLst>
+            <pc:docMk/>
+            <pc:sldMk cId="1110711296" sldId="260"/>
+            <ac:spMk id="3" creationId="{E39E3C0F-4E02-6927-15EF-40D29B17E99E}"/>
+          </ac:spMkLst>
+        </pc:spChg>
+        <pc:spChg chg="add mod">
+          <ac:chgData name="Yan, Hongrui" userId="08bcad00-300c-4922-94f4-b780c0ab1a9c" providerId="ADAL" clId="{748A0DB9-C178-483D-A9CC-9D8C85EBC1EA}" dt="2026-03-05T08:14:06.079" v="421" actId="1076"/>
+          <ac:spMkLst>
+            <pc:docMk/>
+            <pc:sldMk cId="1110711296" sldId="260"/>
+            <ac:spMk id="8" creationId="{588483C4-F497-B130-1DCE-877EE9B8E1D9}"/>
+          </ac:spMkLst>
+        </pc:spChg>
+        <pc:spChg chg="add mod">
+          <ac:chgData name="Yan, Hongrui" userId="08bcad00-300c-4922-94f4-b780c0ab1a9c" providerId="ADAL" clId="{748A0DB9-C178-483D-A9CC-9D8C85EBC1EA}" dt="2026-03-05T08:13:30.672" v="406" actId="20577"/>
+          <ac:spMkLst>
+            <pc:docMk/>
+            <pc:sldMk cId="1110711296" sldId="260"/>
+            <ac:spMk id="15" creationId="{AFF75113-A2E8-5C61-B94C-0F06C5855C79}"/>
+          </ac:spMkLst>
+        </pc:spChg>
+        <pc:spChg chg="add mod">
+          <ac:chgData name="Yan, Hongrui" userId="08bcad00-300c-4922-94f4-b780c0ab1a9c" providerId="ADAL" clId="{748A0DB9-C178-483D-A9CC-9D8C85EBC1EA}" dt="2026-03-05T08:13:45.082" v="419" actId="20577"/>
+          <ac:spMkLst>
+            <pc:docMk/>
+            <pc:sldMk cId="1110711296" sldId="260"/>
+            <ac:spMk id="18" creationId="{C35538AC-C682-0B59-C76E-671816C107CC}"/>
+          </ac:spMkLst>
+        </pc:spChg>
+        <pc:spChg chg="add mod">
+          <ac:chgData name="Yan, Hongrui" userId="08bcad00-300c-4922-94f4-b780c0ab1a9c" providerId="ADAL" clId="{748A0DB9-C178-483D-A9CC-9D8C85EBC1EA}" dt="2026-03-05T08:16:09.858" v="456" actId="20577"/>
+          <ac:spMkLst>
+            <pc:docMk/>
+            <pc:sldMk cId="1110711296" sldId="260"/>
+            <ac:spMk id="23" creationId="{2D4AC374-2E86-5896-B7F8-B21CEFFC53F1}"/>
+          </ac:spMkLst>
+        </pc:spChg>
+        <pc:spChg chg="add mod">
+          <ac:chgData name="Yan, Hongrui" userId="08bcad00-300c-4922-94f4-b780c0ab1a9c" providerId="ADAL" clId="{748A0DB9-C178-483D-A9CC-9D8C85EBC1EA}" dt="2026-03-05T08:16:11.855" v="457" actId="20577"/>
+          <ac:spMkLst>
+            <pc:docMk/>
+            <pc:sldMk cId="1110711296" sldId="260"/>
+            <ac:spMk id="26" creationId="{6D5F3FF0-2898-93DA-089E-353C7E7C92DC}"/>
+          </ac:spMkLst>
+        </pc:spChg>
+        <pc:spChg chg="add mod">
+          <ac:chgData name="Yan, Hongrui" userId="08bcad00-300c-4922-94f4-b780c0ab1a9c" providerId="ADAL" clId="{748A0DB9-C178-483D-A9CC-9D8C85EBC1EA}" dt="2026-03-05T08:28:54.255" v="471" actId="20577"/>
+          <ac:spMkLst>
+            <pc:docMk/>
+            <pc:sldMk cId="1110711296" sldId="260"/>
+            <ac:spMk id="35" creationId="{36302973-EC07-9020-6231-FDDFDE95952B}"/>
+          </ac:spMkLst>
+        </pc:spChg>
+        <pc:picChg chg="add mod">
+          <ac:chgData name="Yan, Hongrui" userId="08bcad00-300c-4922-94f4-b780c0ab1a9c" providerId="ADAL" clId="{748A0DB9-C178-483D-A9CC-9D8C85EBC1EA}" dt="2026-03-05T08:12:48.852" v="390" actId="1076"/>
+          <ac:picMkLst>
+            <pc:docMk/>
+            <pc:sldMk cId="1110711296" sldId="260"/>
+            <ac:picMk id="5" creationId="{55AD9488-524D-7CA2-175F-962C77A4ACCB}"/>
+          </ac:picMkLst>
+        </pc:picChg>
+        <pc:cxnChg chg="add mod">
+          <ac:chgData name="Yan, Hongrui" userId="08bcad00-300c-4922-94f4-b780c0ab1a9c" providerId="ADAL" clId="{748A0DB9-C178-483D-A9CC-9D8C85EBC1EA}" dt="2026-03-05T08:14:03.778" v="420" actId="14100"/>
+          <ac:cxnSpMkLst>
+            <pc:docMk/>
+            <pc:sldMk cId="1110711296" sldId="260"/>
+            <ac:cxnSpMk id="7" creationId="{2D56219D-E404-F247-A0E5-B86E7CA24B79}"/>
+          </ac:cxnSpMkLst>
+        </pc:cxnChg>
+        <pc:cxnChg chg="add mod">
+          <ac:chgData name="Yan, Hongrui" userId="08bcad00-300c-4922-94f4-b780c0ab1a9c" providerId="ADAL" clId="{748A0DB9-C178-483D-A9CC-9D8C85EBC1EA}" dt="2026-03-05T08:13:22.399" v="402" actId="1076"/>
+          <ac:cxnSpMkLst>
+            <pc:docMk/>
+            <pc:sldMk cId="1110711296" sldId="260"/>
+            <ac:cxnSpMk id="9" creationId="{F202FB18-FFA9-8A4B-773D-39196DDED0ED}"/>
+          </ac:cxnSpMkLst>
+        </pc:cxnChg>
+        <pc:cxnChg chg="add mod">
+          <ac:chgData name="Yan, Hongrui" userId="08bcad00-300c-4922-94f4-b780c0ab1a9c" providerId="ADAL" clId="{748A0DB9-C178-483D-A9CC-9D8C85EBC1EA}" dt="2026-03-05T08:13:39.546" v="416" actId="1036"/>
+          <ac:cxnSpMkLst>
+            <pc:docMk/>
+            <pc:sldMk cId="1110711296" sldId="260"/>
+            <ac:cxnSpMk id="16" creationId="{2D1B667F-D635-1A6E-0580-79567F43F6E4}"/>
+          </ac:cxnSpMkLst>
+        </pc:cxnChg>
+        <pc:cxnChg chg="add mod">
+          <ac:chgData name="Yan, Hongrui" userId="08bcad00-300c-4922-94f4-b780c0ab1a9c" providerId="ADAL" clId="{748A0DB9-C178-483D-A9CC-9D8C85EBC1EA}" dt="2026-03-05T08:14:15.998" v="424" actId="14100"/>
+          <ac:cxnSpMkLst>
+            <pc:docMk/>
+            <pc:sldMk cId="1110711296" sldId="260"/>
+            <ac:cxnSpMk id="21" creationId="{79FAB9FB-C905-7DDC-800F-BA60BA22D88D}"/>
+          </ac:cxnSpMkLst>
+        </pc:cxnChg>
+        <pc:cxnChg chg="add mod">
+          <ac:chgData name="Yan, Hongrui" userId="08bcad00-300c-4922-94f4-b780c0ab1a9c" providerId="ADAL" clId="{748A0DB9-C178-483D-A9CC-9D8C85EBC1EA}" dt="2026-03-05T08:16:04.336" v="455" actId="14100"/>
+          <ac:cxnSpMkLst>
+            <pc:docMk/>
+            <pc:sldMk cId="1110711296" sldId="260"/>
+            <ac:cxnSpMk id="24" creationId="{0ED887B3-D1CE-ACAA-7371-47C2E64C28BC}"/>
+          </ac:cxnSpMkLst>
+        </pc:cxnChg>
+        <pc:cxnChg chg="add mod">
+          <ac:chgData name="Yan, Hongrui" userId="08bcad00-300c-4922-94f4-b780c0ab1a9c" providerId="ADAL" clId="{748A0DB9-C178-483D-A9CC-9D8C85EBC1EA}" dt="2026-03-05T08:15:46.823" v="448" actId="14100"/>
+          <ac:cxnSpMkLst>
+            <pc:docMk/>
+            <pc:sldMk cId="1110711296" sldId="260"/>
+            <ac:cxnSpMk id="29" creationId="{B5BA31C3-A9C3-6532-CFD6-C327C582C425}"/>
+          </ac:cxnSpMkLst>
+        </pc:cxnChg>
+        <pc:cxnChg chg="add mod">
+          <ac:chgData name="Yan, Hongrui" userId="08bcad00-300c-4922-94f4-b780c0ab1a9c" providerId="ADAL" clId="{748A0DB9-C178-483D-A9CC-9D8C85EBC1EA}" dt="2026-03-05T08:15:52.920" v="451" actId="14100"/>
+          <ac:cxnSpMkLst>
+            <pc:docMk/>
+            <pc:sldMk cId="1110711296" sldId="260"/>
+            <ac:cxnSpMk id="31" creationId="{BDEA5CA1-5DDC-C1F8-D7D3-23A83A055723}"/>
+          </ac:cxnSpMkLst>
+        </pc:cxnChg>
+      </pc:sldChg>
+      <pc:sldChg chg="addSp delSp modSp new mod">
+        <pc:chgData name="Yan, Hongrui" userId="08bcad00-300c-4922-94f4-b780c0ab1a9c" providerId="ADAL" clId="{748A0DB9-C178-483D-A9CC-9D8C85EBC1EA}" dt="2026-03-05T10:31:30.997" v="567" actId="693"/>
+        <pc:sldMkLst>
+          <pc:docMk/>
+          <pc:sldMk cId="3388954506" sldId="261"/>
+        </pc:sldMkLst>
+        <pc:spChg chg="del">
+          <ac:chgData name="Yan, Hongrui" userId="08bcad00-300c-4922-94f4-b780c0ab1a9c" providerId="ADAL" clId="{748A0DB9-C178-483D-A9CC-9D8C85EBC1EA}" dt="2026-03-05T09:53:51.451" v="474" actId="478"/>
+          <ac:spMkLst>
+            <pc:docMk/>
+            <pc:sldMk cId="3388954506" sldId="261"/>
+            <ac:spMk id="2" creationId="{EBCB0D7C-6762-4924-79A8-FB554551C4BD}"/>
+          </ac:spMkLst>
+        </pc:spChg>
+        <pc:spChg chg="del">
+          <ac:chgData name="Yan, Hongrui" userId="08bcad00-300c-4922-94f4-b780c0ab1a9c" providerId="ADAL" clId="{748A0DB9-C178-483D-A9CC-9D8C85EBC1EA}" dt="2026-03-05T09:53:50.306" v="473" actId="478"/>
+          <ac:spMkLst>
+            <pc:docMk/>
+            <pc:sldMk cId="3388954506" sldId="261"/>
+            <ac:spMk id="3" creationId="{B0B66CCC-0358-CDDB-651D-6FCDA5AA51D2}"/>
+          </ac:spMkLst>
+        </pc:spChg>
+        <pc:grpChg chg="add mod">
+          <ac:chgData name="Yan, Hongrui" userId="08bcad00-300c-4922-94f4-b780c0ab1a9c" providerId="ADAL" clId="{748A0DB9-C178-483D-A9CC-9D8C85EBC1EA}" dt="2026-03-05T10:28:13.673" v="561" actId="14100"/>
+          <ac:grpSpMkLst>
+            <pc:docMk/>
+            <pc:sldMk cId="3388954506" sldId="261"/>
+            <ac:grpSpMk id="6" creationId="{B0E505D8-880B-3DF7-4D75-FD275697ED64}"/>
+          </ac:grpSpMkLst>
+        </pc:grpChg>
+        <pc:picChg chg="add mod ord">
+          <ac:chgData name="Yan, Hongrui" userId="08bcad00-300c-4922-94f4-b780c0ab1a9c" providerId="ADAL" clId="{748A0DB9-C178-483D-A9CC-9D8C85EBC1EA}" dt="2026-03-05T10:28:01.179" v="552" actId="164"/>
+          <ac:picMkLst>
+            <pc:docMk/>
+            <pc:sldMk cId="3388954506" sldId="261"/>
+            <ac:picMk id="3" creationId="{303DAED3-D727-F421-88A2-93C122A5079C}"/>
+          </ac:picMkLst>
+        </pc:picChg>
+        <pc:picChg chg="add mod ord">
+          <ac:chgData name="Yan, Hongrui" userId="08bcad00-300c-4922-94f4-b780c0ab1a9c" providerId="ADAL" clId="{748A0DB9-C178-483D-A9CC-9D8C85EBC1EA}" dt="2026-03-05T10:28:03.519" v="554" actId="1076"/>
+          <ac:picMkLst>
+            <pc:docMk/>
+            <pc:sldMk cId="3388954506" sldId="261"/>
+            <ac:picMk id="4" creationId="{43FB86FC-B56E-1513-02DA-FE649C060D52}"/>
+          </ac:picMkLst>
+        </pc:picChg>
+        <pc:picChg chg="add del mod">
+          <ac:chgData name="Yan, Hongrui" userId="08bcad00-300c-4922-94f4-b780c0ab1a9c" providerId="ADAL" clId="{748A0DB9-C178-483D-A9CC-9D8C85EBC1EA}" dt="2026-03-05T10:27:35.177" v="539" actId="478"/>
+          <ac:picMkLst>
+            <pc:docMk/>
+            <pc:sldMk cId="3388954506" sldId="261"/>
+            <ac:picMk id="5" creationId="{369CA58D-FED5-83AA-6C12-AFC600FB3F4C}"/>
+          </ac:picMkLst>
+        </pc:picChg>
+        <pc:picChg chg="add mod">
+          <ac:chgData name="Yan, Hongrui" userId="08bcad00-300c-4922-94f4-b780c0ab1a9c" providerId="ADAL" clId="{748A0DB9-C178-483D-A9CC-9D8C85EBC1EA}" dt="2026-03-05T10:28:01.179" v="552" actId="164"/>
+          <ac:picMkLst>
+            <pc:docMk/>
+            <pc:sldMk cId="3388954506" sldId="261"/>
+            <ac:picMk id="7" creationId="{E0AD2333-72C9-C1B7-F0B2-812E93A65CE2}"/>
+          </ac:picMkLst>
+        </pc:picChg>
+        <pc:cxnChg chg="add mod">
+          <ac:chgData name="Yan, Hongrui" userId="08bcad00-300c-4922-94f4-b780c0ab1a9c" providerId="ADAL" clId="{748A0DB9-C178-483D-A9CC-9D8C85EBC1EA}" dt="2026-03-05T10:31:23.639" v="566" actId="693"/>
+          <ac:cxnSpMkLst>
+            <pc:docMk/>
+            <pc:sldMk cId="3388954506" sldId="261"/>
+            <ac:cxnSpMk id="5" creationId="{63C99806-87FE-78E3-6B7A-218E8CBAD0B6}"/>
+          </ac:cxnSpMkLst>
+        </pc:cxnChg>
+        <pc:cxnChg chg="add mod">
+          <ac:chgData name="Yan, Hongrui" userId="08bcad00-300c-4922-94f4-b780c0ab1a9c" providerId="ADAL" clId="{748A0DB9-C178-483D-A9CC-9D8C85EBC1EA}" dt="2026-03-05T10:31:30.997" v="567" actId="693"/>
+          <ac:cxnSpMkLst>
+            <pc:docMk/>
+            <pc:sldMk cId="3388954506" sldId="261"/>
+            <ac:cxnSpMk id="8" creationId="{44E45AD4-C691-A782-9458-BEFE5104D437}"/>
+          </ac:cxnSpMkLst>
+        </pc:cxnChg>
+        <pc:cxnChg chg="add del mod">
+          <ac:chgData name="Yan, Hongrui" userId="08bcad00-300c-4922-94f4-b780c0ab1a9c" providerId="ADAL" clId="{748A0DB9-C178-483D-A9CC-9D8C85EBC1EA}" dt="2026-03-05T10:27:50.387" v="547" actId="478"/>
+          <ac:cxnSpMkLst>
+            <pc:docMk/>
+            <pc:sldMk cId="3388954506" sldId="261"/>
+            <ac:cxnSpMk id="9" creationId="{9702E6D7-6694-8C04-EBE1-B6857548F409}"/>
+          </ac:cxnSpMkLst>
+        </pc:cxnChg>
+        <pc:cxnChg chg="add del mod">
+          <ac:chgData name="Yan, Hongrui" userId="08bcad00-300c-4922-94f4-b780c0ab1a9c" providerId="ADAL" clId="{748A0DB9-C178-483D-A9CC-9D8C85EBC1EA}" dt="2026-03-05T10:27:49.076" v="546" actId="478"/>
+          <ac:cxnSpMkLst>
+            <pc:docMk/>
+            <pc:sldMk cId="3388954506" sldId="261"/>
+            <ac:cxnSpMk id="10" creationId="{561F5E7D-F0E6-C25D-0DE5-0E583378EE5C}"/>
           </ac:cxnSpMkLst>
         </pc:cxnChg>
       </pc:sldChg>
@@ -514,7 +666,7 @@
           <a:p>
             <a:fld id="{683D744F-9E3D-4A82-9874-86B951D29713}" type="datetimeFigureOut">
               <a:rPr lang="zh-CN" altLang="en-US" smtClean="0"/>
-              <a:t>2026/2/22</a:t>
+              <a:t>2026/3/5</a:t>
             </a:fld>
             <a:endParaRPr lang="zh-CN" altLang="en-US"/>
           </a:p>
@@ -809,6 +961,13 @@
           </p:nvPr>
         </p:nvSpPr>
         <p:spPr/>
+        <p:txBody>
+          <a:bodyPr/>
+          <a:lstStyle/>
+          <a:p>
+            <a:endParaRPr lang="zh-CN" altLang="en-US"/>
+          </a:p>
+        </p:txBody>
       </p:sp>
       <p:sp>
         <p:nvSpPr>
@@ -856,6 +1015,97 @@
     <p:extLst>
       <p:ext uri="{BB962C8B-B14F-4D97-AF65-F5344CB8AC3E}">
         <p14:creationId xmlns:p14="http://schemas.microsoft.com/office/powerpoint/2010/main" val="3175329925"/>
+      </p:ext>
+    </p:extLst>
+  </p:cSld>
+  <p:clrMapOvr>
+    <a:masterClrMapping/>
+  </p:clrMapOvr>
+</p:notes>
+</file>
+
+<file path=ppt/notesSlides/notesSlide2.xml><?xml version="1.0" encoding="utf-8"?>
+<p:notes xmlns:a="http://schemas.openxmlformats.org/drawingml/2006/main" xmlns:r="http://schemas.openxmlformats.org/officeDocument/2006/relationships" xmlns:p="http://schemas.openxmlformats.org/presentationml/2006/main">
+  <p:cSld>
+    <p:spTree>
+      <p:nvGrpSpPr>
+        <p:cNvPr id="1" name=""/>
+        <p:cNvGrpSpPr/>
+        <p:nvPr/>
+      </p:nvGrpSpPr>
+      <p:grpSpPr>
+        <a:xfrm>
+          <a:off x="0" y="0"/>
+          <a:ext cx="0" cy="0"/>
+          <a:chOff x="0" y="0"/>
+          <a:chExt cx="0" cy="0"/>
+        </a:xfrm>
+      </p:grpSpPr>
+      <p:sp>
+        <p:nvSpPr>
+          <p:cNvPr id="2" name="幻灯片图像占位符 1"/>
+          <p:cNvSpPr>
+            <a:spLocks noGrp="1" noRot="1" noChangeAspect="1"/>
+          </p:cNvSpPr>
+          <p:nvPr>
+            <p:ph type="sldImg"/>
+          </p:nvPr>
+        </p:nvSpPr>
+        <p:spPr/>
+        <p:txBody>
+          <a:bodyPr/>
+          <a:lstStyle/>
+          <a:p>
+            <a:endParaRPr lang="zh-CN" altLang="en-US"/>
+          </a:p>
+        </p:txBody>
+      </p:sp>
+      <p:sp>
+        <p:nvSpPr>
+          <p:cNvPr id="3" name="备注占位符 2"/>
+          <p:cNvSpPr>
+            <a:spLocks noGrp="1"/>
+          </p:cNvSpPr>
+          <p:nvPr>
+            <p:ph type="body" idx="1"/>
+          </p:nvPr>
+        </p:nvSpPr>
+        <p:spPr/>
+        <p:txBody>
+          <a:bodyPr/>
+          <a:lstStyle/>
+          <a:p>
+            <a:endParaRPr lang="zh-CN" altLang="en-US" dirty="0"/>
+          </a:p>
+        </p:txBody>
+      </p:sp>
+      <p:sp>
+        <p:nvSpPr>
+          <p:cNvPr id="4" name="灯片编号占位符 3"/>
+          <p:cNvSpPr>
+            <a:spLocks noGrp="1"/>
+          </p:cNvSpPr>
+          <p:nvPr>
+            <p:ph type="sldNum" sz="quarter" idx="5"/>
+          </p:nvPr>
+        </p:nvSpPr>
+        <p:spPr/>
+        <p:txBody>
+          <a:bodyPr/>
+          <a:lstStyle/>
+          <a:p>
+            <a:fld id="{DE248A64-259A-45D7-AC24-394347502A60}" type="slidenum">
+              <a:rPr lang="zh-CN" altLang="en-US" smtClean="0"/>
+              <a:t>5</a:t>
+            </a:fld>
+            <a:endParaRPr lang="zh-CN" altLang="en-US"/>
+          </a:p>
+        </p:txBody>
+      </p:sp>
+    </p:spTree>
+    <p:extLst>
+      <p:ext uri="{BB962C8B-B14F-4D97-AF65-F5344CB8AC3E}">
+        <p14:creationId xmlns:p14="http://schemas.microsoft.com/office/powerpoint/2010/main" val="405081818"/>
       </p:ext>
     </p:extLst>
   </p:cSld>
@@ -1012,7 +1262,7 @@
           <a:p>
             <a:fld id="{767D10B3-659E-48DC-BEBF-7D1F8C91438B}" type="datetimeFigureOut">
               <a:rPr lang="zh-CN" altLang="en-US" smtClean="0"/>
-              <a:t>2026/2/22</a:t>
+              <a:t>2026/3/5</a:t>
             </a:fld>
             <a:endParaRPr lang="zh-CN" altLang="en-US"/>
           </a:p>
@@ -1210,7 +1460,7 @@
           <a:p>
             <a:fld id="{767D10B3-659E-48DC-BEBF-7D1F8C91438B}" type="datetimeFigureOut">
               <a:rPr lang="zh-CN" altLang="en-US" smtClean="0"/>
-              <a:t>2026/2/22</a:t>
+              <a:t>2026/3/5</a:t>
             </a:fld>
             <a:endParaRPr lang="zh-CN" altLang="en-US"/>
           </a:p>
@@ -1418,7 +1668,7 @@
           <a:p>
             <a:fld id="{767D10B3-659E-48DC-BEBF-7D1F8C91438B}" type="datetimeFigureOut">
               <a:rPr lang="zh-CN" altLang="en-US" smtClean="0"/>
-              <a:t>2026/2/22</a:t>
+              <a:t>2026/3/5</a:t>
             </a:fld>
             <a:endParaRPr lang="zh-CN" altLang="en-US"/>
           </a:p>
@@ -1616,7 +1866,7 @@
           <a:p>
             <a:fld id="{767D10B3-659E-48DC-BEBF-7D1F8C91438B}" type="datetimeFigureOut">
               <a:rPr lang="zh-CN" altLang="en-US" smtClean="0"/>
-              <a:t>2026/2/22</a:t>
+              <a:t>2026/3/5</a:t>
             </a:fld>
             <a:endParaRPr lang="zh-CN" altLang="en-US"/>
           </a:p>
@@ -1891,7 +2141,7 @@
           <a:p>
             <a:fld id="{767D10B3-659E-48DC-BEBF-7D1F8C91438B}" type="datetimeFigureOut">
               <a:rPr lang="zh-CN" altLang="en-US" smtClean="0"/>
-              <a:t>2026/2/22</a:t>
+              <a:t>2026/3/5</a:t>
             </a:fld>
             <a:endParaRPr lang="zh-CN" altLang="en-US"/>
           </a:p>
@@ -2156,7 +2406,7 @@
           <a:p>
             <a:fld id="{767D10B3-659E-48DC-BEBF-7D1F8C91438B}" type="datetimeFigureOut">
               <a:rPr lang="zh-CN" altLang="en-US" smtClean="0"/>
-              <a:t>2026/2/22</a:t>
+              <a:t>2026/3/5</a:t>
             </a:fld>
             <a:endParaRPr lang="zh-CN" altLang="en-US"/>
           </a:p>
@@ -2568,7 +2818,7 @@
           <a:p>
             <a:fld id="{767D10B3-659E-48DC-BEBF-7D1F8C91438B}" type="datetimeFigureOut">
               <a:rPr lang="zh-CN" altLang="en-US" smtClean="0"/>
-              <a:t>2026/2/22</a:t>
+              <a:t>2026/3/5</a:t>
             </a:fld>
             <a:endParaRPr lang="zh-CN" altLang="en-US"/>
           </a:p>
@@ -2709,7 +2959,7 @@
           <a:p>
             <a:fld id="{767D10B3-659E-48DC-BEBF-7D1F8C91438B}" type="datetimeFigureOut">
               <a:rPr lang="zh-CN" altLang="en-US" smtClean="0"/>
-              <a:t>2026/2/22</a:t>
+              <a:t>2026/3/5</a:t>
             </a:fld>
             <a:endParaRPr lang="zh-CN" altLang="en-US"/>
           </a:p>
@@ -2822,7 +3072,7 @@
           <a:p>
             <a:fld id="{767D10B3-659E-48DC-BEBF-7D1F8C91438B}" type="datetimeFigureOut">
               <a:rPr lang="zh-CN" altLang="en-US" smtClean="0"/>
-              <a:t>2026/2/22</a:t>
+              <a:t>2026/3/5</a:t>
             </a:fld>
             <a:endParaRPr lang="zh-CN" altLang="en-US"/>
           </a:p>
@@ -3133,7 +3383,7 @@
           <a:p>
             <a:fld id="{767D10B3-659E-48DC-BEBF-7D1F8C91438B}" type="datetimeFigureOut">
               <a:rPr lang="zh-CN" altLang="en-US" smtClean="0"/>
-              <a:t>2026/2/22</a:t>
+              <a:t>2026/3/5</a:t>
             </a:fld>
             <a:endParaRPr lang="zh-CN" altLang="en-US"/>
           </a:p>
@@ -3421,7 +3671,7 @@
           <a:p>
             <a:fld id="{767D10B3-659E-48DC-BEBF-7D1F8C91438B}" type="datetimeFigureOut">
               <a:rPr lang="zh-CN" altLang="en-US" smtClean="0"/>
-              <a:t>2026/2/22</a:t>
+              <a:t>2026/3/5</a:t>
             </a:fld>
             <a:endParaRPr lang="zh-CN" altLang="en-US"/>
           </a:p>
@@ -3662,7 +3912,7 @@
           <a:p>
             <a:fld id="{767D10B3-659E-48DC-BEBF-7D1F8C91438B}" type="datetimeFigureOut">
               <a:rPr lang="zh-CN" altLang="en-US" smtClean="0"/>
-              <a:t>2026/2/22</a:t>
+              <a:t>2026/3/5</a:t>
             </a:fld>
             <a:endParaRPr lang="zh-CN" altLang="en-US"/>
           </a:p>
@@ -5141,6 +5391,832 @@
     <p:extLst>
       <p:ext uri="{BB962C8B-B14F-4D97-AF65-F5344CB8AC3E}">
         <p14:creationId xmlns:p14="http://schemas.microsoft.com/office/powerpoint/2010/main" val="1233551501"/>
+      </p:ext>
+    </p:extLst>
+  </p:cSld>
+  <p:clrMapOvr>
+    <a:masterClrMapping/>
+  </p:clrMapOvr>
+</p:sld>
+</file>
+
+<file path=ppt/slides/slide5.xml><?xml version="1.0" encoding="utf-8"?>
+<p:sld xmlns:a="http://schemas.openxmlformats.org/drawingml/2006/main" xmlns:r="http://schemas.openxmlformats.org/officeDocument/2006/relationships" xmlns:p="http://schemas.openxmlformats.org/presentationml/2006/main">
+  <p:cSld>
+    <p:spTree>
+      <p:nvGrpSpPr>
+        <p:cNvPr id="1" name=""/>
+        <p:cNvGrpSpPr/>
+        <p:nvPr/>
+      </p:nvGrpSpPr>
+      <p:grpSpPr>
+        <a:xfrm>
+          <a:off x="0" y="0"/>
+          <a:ext cx="0" cy="0"/>
+          <a:chOff x="0" y="0"/>
+          <a:chExt cx="0" cy="0"/>
+        </a:xfrm>
+      </p:grpSpPr>
+      <p:pic>
+        <p:nvPicPr>
+          <p:cNvPr id="5" name="图片 4" descr="卡通人物&#10;&#10;AI 生成的内容可能不正确。">
+            <a:extLst>
+              <a:ext uri="{FF2B5EF4-FFF2-40B4-BE49-F238E27FC236}">
+                <a16:creationId xmlns:a16="http://schemas.microsoft.com/office/drawing/2014/main" id="{55AD9488-524D-7CA2-175F-962C77A4ACCB}"/>
+              </a:ext>
+            </a:extLst>
+          </p:cNvPr>
+          <p:cNvPicPr>
+            <a:picLocks noChangeAspect="1"/>
+          </p:cNvPicPr>
+          <p:nvPr/>
+        </p:nvPicPr>
+        <p:blipFill>
+          <a:blip r:embed="rId3">
+            <a:extLst>
+              <a:ext uri="{28A0092B-C50C-407E-A947-70E740481C1C}">
+                <a14:useLocalDpi xmlns:a14="http://schemas.microsoft.com/office/drawing/2010/main" val="0"/>
+              </a:ext>
+            </a:extLst>
+          </a:blip>
+          <a:stretch>
+            <a:fillRect/>
+          </a:stretch>
+        </p:blipFill>
+        <p:spPr>
+          <a:xfrm>
+            <a:off x="35188" y="-19908"/>
+            <a:ext cx="12156812" cy="6877908"/>
+          </a:xfrm>
+          <a:prstGeom prst="rect">
+            <a:avLst/>
+          </a:prstGeom>
+        </p:spPr>
+      </p:pic>
+      <p:cxnSp>
+        <p:nvCxnSpPr>
+          <p:cNvPr id="7" name="直接箭头连接符 6">
+            <a:extLst>
+              <a:ext uri="{FF2B5EF4-FFF2-40B4-BE49-F238E27FC236}">
+                <a16:creationId xmlns:a16="http://schemas.microsoft.com/office/drawing/2014/main" id="{2D56219D-E404-F247-A0E5-B86E7CA24B79}"/>
+              </a:ext>
+            </a:extLst>
+          </p:cNvPr>
+          <p:cNvCxnSpPr>
+            <a:cxnSpLocks/>
+          </p:cNvCxnSpPr>
+          <p:nvPr/>
+        </p:nvCxnSpPr>
+        <p:spPr>
+          <a:xfrm flipV="1">
+            <a:off x="5176969" y="3994150"/>
+            <a:ext cx="4557581" cy="2006600"/>
+          </a:xfrm>
+          <a:prstGeom prst="straightConnector1">
+            <a:avLst/>
+          </a:prstGeom>
+          <a:ln w="57150">
+            <a:tailEnd type="triangle"/>
+          </a:ln>
+        </p:spPr>
+        <p:style>
+          <a:lnRef idx="2">
+            <a:schemeClr val="dk1"/>
+          </a:lnRef>
+          <a:fillRef idx="0">
+            <a:schemeClr val="dk1"/>
+          </a:fillRef>
+          <a:effectRef idx="1">
+            <a:schemeClr val="dk1"/>
+          </a:effectRef>
+          <a:fontRef idx="minor">
+            <a:schemeClr val="tx1"/>
+          </a:fontRef>
+        </p:style>
+      </p:cxnSp>
+      <p:sp>
+        <p:nvSpPr>
+          <p:cNvPr id="8" name="文本框 7">
+            <a:extLst>
+              <a:ext uri="{FF2B5EF4-FFF2-40B4-BE49-F238E27FC236}">
+                <a16:creationId xmlns:a16="http://schemas.microsoft.com/office/drawing/2014/main" id="{588483C4-F497-B130-1DCE-877EE9B8E1D9}"/>
+              </a:ext>
+            </a:extLst>
+          </p:cNvPr>
+          <p:cNvSpPr txBox="1"/>
+          <p:nvPr/>
+        </p:nvSpPr>
+        <p:spPr>
+          <a:xfrm>
+            <a:off x="9540090" y="3991916"/>
+            <a:ext cx="526408" cy="461665"/>
+          </a:xfrm>
+          <a:prstGeom prst="rect">
+            <a:avLst/>
+          </a:prstGeom>
+          <a:noFill/>
+        </p:spPr>
+        <p:txBody>
+          <a:bodyPr wrap="square" rtlCol="0">
+            <a:spAutoFit/>
+          </a:bodyPr>
+          <a:lstStyle/>
+          <a:p>
+            <a:r>
+              <a:rPr lang="en-US" altLang="zh-CN" sz="2400" b="1" dirty="0">
+                <a:latin typeface="Times New Roman" panose="02020603050405020304" pitchFamily="18" charset="0"/>
+                <a:cs typeface="Times New Roman" panose="02020603050405020304" pitchFamily="18" charset="0"/>
+              </a:rPr>
+              <a:t>z</a:t>
+            </a:r>
+            <a:endParaRPr lang="zh-CN" altLang="en-US" sz="2400" b="1" dirty="0">
+              <a:latin typeface="Times New Roman" panose="02020603050405020304" pitchFamily="18" charset="0"/>
+              <a:cs typeface="Times New Roman" panose="02020603050405020304" pitchFamily="18" charset="0"/>
+            </a:endParaRPr>
+          </a:p>
+        </p:txBody>
+      </p:sp>
+      <p:cxnSp>
+        <p:nvCxnSpPr>
+          <p:cNvPr id="9" name="直接箭头连接符 8">
+            <a:extLst>
+              <a:ext uri="{FF2B5EF4-FFF2-40B4-BE49-F238E27FC236}">
+                <a16:creationId xmlns:a16="http://schemas.microsoft.com/office/drawing/2014/main" id="{F202FB18-FFA9-8A4B-773D-39196DDED0ED}"/>
+              </a:ext>
+            </a:extLst>
+          </p:cNvPr>
+          <p:cNvCxnSpPr>
+            <a:cxnSpLocks/>
+          </p:cNvCxnSpPr>
+          <p:nvPr/>
+        </p:nvCxnSpPr>
+        <p:spPr>
+          <a:xfrm>
+            <a:off x="5176969" y="6000750"/>
+            <a:ext cx="2584450" cy="552450"/>
+          </a:xfrm>
+          <a:prstGeom prst="straightConnector1">
+            <a:avLst/>
+          </a:prstGeom>
+          <a:ln w="57150">
+            <a:tailEnd type="triangle"/>
+          </a:ln>
+        </p:spPr>
+        <p:style>
+          <a:lnRef idx="2">
+            <a:schemeClr val="dk1"/>
+          </a:lnRef>
+          <a:fillRef idx="0">
+            <a:schemeClr val="dk1"/>
+          </a:fillRef>
+          <a:effectRef idx="1">
+            <a:schemeClr val="dk1"/>
+          </a:effectRef>
+          <a:fontRef idx="minor">
+            <a:schemeClr val="tx1"/>
+          </a:fontRef>
+        </p:style>
+      </p:cxnSp>
+      <p:sp>
+        <p:nvSpPr>
+          <p:cNvPr id="15" name="文本框 14">
+            <a:extLst>
+              <a:ext uri="{FF2B5EF4-FFF2-40B4-BE49-F238E27FC236}">
+                <a16:creationId xmlns:a16="http://schemas.microsoft.com/office/drawing/2014/main" id="{AFF75113-A2E8-5C61-B94C-0F06C5855C79}"/>
+              </a:ext>
+            </a:extLst>
+          </p:cNvPr>
+          <p:cNvSpPr txBox="1"/>
+          <p:nvPr/>
+        </p:nvSpPr>
+        <p:spPr>
+          <a:xfrm>
+            <a:off x="7290442" y="5967709"/>
+            <a:ext cx="526408" cy="461665"/>
+          </a:xfrm>
+          <a:prstGeom prst="rect">
+            <a:avLst/>
+          </a:prstGeom>
+          <a:noFill/>
+        </p:spPr>
+        <p:txBody>
+          <a:bodyPr wrap="square" rtlCol="0">
+            <a:spAutoFit/>
+          </a:bodyPr>
+          <a:lstStyle/>
+          <a:p>
+            <a:r>
+              <a:rPr lang="en-US" altLang="zh-CN" sz="2400" b="1" dirty="0">
+                <a:latin typeface="Times New Roman" panose="02020603050405020304" pitchFamily="18" charset="0"/>
+                <a:cs typeface="Times New Roman" panose="02020603050405020304" pitchFamily="18" charset="0"/>
+              </a:rPr>
+              <a:t>x</a:t>
+            </a:r>
+            <a:endParaRPr lang="zh-CN" altLang="en-US" sz="2400" b="1" dirty="0">
+              <a:latin typeface="Times New Roman" panose="02020603050405020304" pitchFamily="18" charset="0"/>
+              <a:cs typeface="Times New Roman" panose="02020603050405020304" pitchFamily="18" charset="0"/>
+            </a:endParaRPr>
+          </a:p>
+        </p:txBody>
+      </p:sp>
+      <p:cxnSp>
+        <p:nvCxnSpPr>
+          <p:cNvPr id="16" name="直接箭头连接符 15">
+            <a:extLst>
+              <a:ext uri="{FF2B5EF4-FFF2-40B4-BE49-F238E27FC236}">
+                <a16:creationId xmlns:a16="http://schemas.microsoft.com/office/drawing/2014/main" id="{2D1B667F-D635-1A6E-0580-79567F43F6E4}"/>
+              </a:ext>
+            </a:extLst>
+          </p:cNvPr>
+          <p:cNvCxnSpPr>
+            <a:cxnSpLocks/>
+          </p:cNvCxnSpPr>
+          <p:nvPr/>
+        </p:nvCxnSpPr>
+        <p:spPr>
+          <a:xfrm flipV="1">
+            <a:off x="5208719" y="3994150"/>
+            <a:ext cx="0" cy="2019300"/>
+          </a:xfrm>
+          <a:prstGeom prst="straightConnector1">
+            <a:avLst/>
+          </a:prstGeom>
+          <a:ln w="57150">
+            <a:tailEnd type="triangle"/>
+          </a:ln>
+        </p:spPr>
+        <p:style>
+          <a:lnRef idx="2">
+            <a:schemeClr val="dk1"/>
+          </a:lnRef>
+          <a:fillRef idx="0">
+            <a:schemeClr val="dk1"/>
+          </a:fillRef>
+          <a:effectRef idx="1">
+            <a:schemeClr val="dk1"/>
+          </a:effectRef>
+          <a:fontRef idx="minor">
+            <a:schemeClr val="tx1"/>
+          </a:fontRef>
+        </p:style>
+      </p:cxnSp>
+      <p:sp>
+        <p:nvSpPr>
+          <p:cNvPr id="18" name="文本框 17">
+            <a:extLst>
+              <a:ext uri="{FF2B5EF4-FFF2-40B4-BE49-F238E27FC236}">
+                <a16:creationId xmlns:a16="http://schemas.microsoft.com/office/drawing/2014/main" id="{C35538AC-C682-0B59-C76E-671816C107CC}"/>
+              </a:ext>
+            </a:extLst>
+          </p:cNvPr>
+          <p:cNvSpPr txBox="1"/>
+          <p:nvPr/>
+        </p:nvSpPr>
+        <p:spPr>
+          <a:xfrm>
+            <a:off x="5346208" y="3811884"/>
+            <a:ext cx="526408" cy="461665"/>
+          </a:xfrm>
+          <a:prstGeom prst="rect">
+            <a:avLst/>
+          </a:prstGeom>
+          <a:noFill/>
+        </p:spPr>
+        <p:txBody>
+          <a:bodyPr wrap="square" rtlCol="0">
+            <a:spAutoFit/>
+          </a:bodyPr>
+          <a:lstStyle/>
+          <a:p>
+            <a:r>
+              <a:rPr lang="en-US" altLang="zh-CN" sz="2400" b="1" dirty="0">
+                <a:latin typeface="Times New Roman" panose="02020603050405020304" pitchFamily="18" charset="0"/>
+                <a:cs typeface="Times New Roman" panose="02020603050405020304" pitchFamily="18" charset="0"/>
+              </a:rPr>
+              <a:t>y</a:t>
+            </a:r>
+            <a:endParaRPr lang="zh-CN" altLang="en-US" sz="2400" b="1" dirty="0">
+              <a:latin typeface="Times New Roman" panose="02020603050405020304" pitchFamily="18" charset="0"/>
+              <a:cs typeface="Times New Roman" panose="02020603050405020304" pitchFamily="18" charset="0"/>
+            </a:endParaRPr>
+          </a:p>
+        </p:txBody>
+      </p:sp>
+      <p:cxnSp>
+        <p:nvCxnSpPr>
+          <p:cNvPr id="21" name="直接箭头连接符 20">
+            <a:extLst>
+              <a:ext uri="{FF2B5EF4-FFF2-40B4-BE49-F238E27FC236}">
+                <a16:creationId xmlns:a16="http://schemas.microsoft.com/office/drawing/2014/main" id="{79FAB9FB-C905-7DDC-800F-BA60BA22D88D}"/>
+              </a:ext>
+            </a:extLst>
+          </p:cNvPr>
+          <p:cNvCxnSpPr>
+            <a:cxnSpLocks/>
+          </p:cNvCxnSpPr>
+          <p:nvPr/>
+        </p:nvCxnSpPr>
+        <p:spPr>
+          <a:xfrm flipV="1">
+            <a:off x="4337050" y="1014280"/>
+            <a:ext cx="1535566" cy="1493970"/>
+          </a:xfrm>
+          <a:prstGeom prst="straightConnector1">
+            <a:avLst/>
+          </a:prstGeom>
+          <a:ln>
+            <a:tailEnd type="triangle"/>
+          </a:ln>
+        </p:spPr>
+        <p:style>
+          <a:lnRef idx="2">
+            <a:schemeClr val="dk1"/>
+          </a:lnRef>
+          <a:fillRef idx="0">
+            <a:schemeClr val="dk1"/>
+          </a:fillRef>
+          <a:effectRef idx="1">
+            <a:schemeClr val="dk1"/>
+          </a:effectRef>
+          <a:fontRef idx="minor">
+            <a:schemeClr val="tx1"/>
+          </a:fontRef>
+        </p:style>
+      </p:cxnSp>
+      <p:sp>
+        <p:nvSpPr>
+          <p:cNvPr id="23" name="文本框 22">
+            <a:extLst>
+              <a:ext uri="{FF2B5EF4-FFF2-40B4-BE49-F238E27FC236}">
+                <a16:creationId xmlns:a16="http://schemas.microsoft.com/office/drawing/2014/main" id="{2D4AC374-2E86-5896-B7F8-B21CEFFC53F1}"/>
+              </a:ext>
+            </a:extLst>
+          </p:cNvPr>
+          <p:cNvSpPr txBox="1"/>
+          <p:nvPr/>
+        </p:nvSpPr>
+        <p:spPr>
+          <a:xfrm>
+            <a:off x="5850390" y="626417"/>
+            <a:ext cx="790426" cy="461665"/>
+          </a:xfrm>
+          <a:prstGeom prst="rect">
+            <a:avLst/>
+          </a:prstGeom>
+          <a:noFill/>
+        </p:spPr>
+        <p:txBody>
+          <a:bodyPr wrap="square" rtlCol="0">
+            <a:spAutoFit/>
+          </a:bodyPr>
+          <a:lstStyle/>
+          <a:p>
+            <a:r>
+              <a:rPr lang="en-US" altLang="zh-CN" sz="2400" b="1" dirty="0">
+                <a:latin typeface="Times New Roman" panose="02020603050405020304" pitchFamily="18" charset="0"/>
+                <a:cs typeface="Times New Roman" panose="02020603050405020304" pitchFamily="18" charset="0"/>
+              </a:rPr>
+              <a:t>A_a</a:t>
+            </a:r>
+            <a:endParaRPr lang="zh-CN" altLang="en-US" sz="2400" b="1" dirty="0">
+              <a:latin typeface="Times New Roman" panose="02020603050405020304" pitchFamily="18" charset="0"/>
+              <a:cs typeface="Times New Roman" panose="02020603050405020304" pitchFamily="18" charset="0"/>
+            </a:endParaRPr>
+          </a:p>
+        </p:txBody>
+      </p:sp>
+      <p:cxnSp>
+        <p:nvCxnSpPr>
+          <p:cNvPr id="24" name="直接箭头连接符 23">
+            <a:extLst>
+              <a:ext uri="{FF2B5EF4-FFF2-40B4-BE49-F238E27FC236}">
+                <a16:creationId xmlns:a16="http://schemas.microsoft.com/office/drawing/2014/main" id="{0ED887B3-D1CE-ACAA-7371-47C2E64C28BC}"/>
+              </a:ext>
+            </a:extLst>
+          </p:cNvPr>
+          <p:cNvCxnSpPr>
+            <a:cxnSpLocks/>
+          </p:cNvCxnSpPr>
+          <p:nvPr/>
+        </p:nvCxnSpPr>
+        <p:spPr>
+          <a:xfrm flipH="1" flipV="1">
+            <a:off x="1143000" y="1403350"/>
+            <a:ext cx="1174260" cy="749597"/>
+          </a:xfrm>
+          <a:prstGeom prst="straightConnector1">
+            <a:avLst/>
+          </a:prstGeom>
+          <a:ln>
+            <a:tailEnd type="triangle"/>
+          </a:ln>
+        </p:spPr>
+        <p:style>
+          <a:lnRef idx="2">
+            <a:schemeClr val="dk1"/>
+          </a:lnRef>
+          <a:fillRef idx="0">
+            <a:schemeClr val="dk1"/>
+          </a:fillRef>
+          <a:effectRef idx="1">
+            <a:schemeClr val="dk1"/>
+          </a:effectRef>
+          <a:fontRef idx="minor">
+            <a:schemeClr val="tx1"/>
+          </a:fontRef>
+        </p:style>
+      </p:cxnSp>
+      <p:sp>
+        <p:nvSpPr>
+          <p:cNvPr id="26" name="文本框 25">
+            <a:extLst>
+              <a:ext uri="{FF2B5EF4-FFF2-40B4-BE49-F238E27FC236}">
+                <a16:creationId xmlns:a16="http://schemas.microsoft.com/office/drawing/2014/main" id="{6D5F3FF0-2898-93DA-089E-353C7E7C92DC}"/>
+              </a:ext>
+            </a:extLst>
+          </p:cNvPr>
+          <p:cNvSpPr txBox="1"/>
+          <p:nvPr/>
+        </p:nvSpPr>
+        <p:spPr>
+          <a:xfrm>
+            <a:off x="496698" y="1088082"/>
+            <a:ext cx="735202" cy="461665"/>
+          </a:xfrm>
+          <a:prstGeom prst="rect">
+            <a:avLst/>
+          </a:prstGeom>
+          <a:noFill/>
+        </p:spPr>
+        <p:txBody>
+          <a:bodyPr wrap="square" rtlCol="0">
+            <a:spAutoFit/>
+          </a:bodyPr>
+          <a:lstStyle/>
+          <a:p>
+            <a:r>
+              <a:rPr lang="en-US" altLang="zh-CN" sz="2400" b="1" dirty="0">
+                <a:latin typeface="Times New Roman" panose="02020603050405020304" pitchFamily="18" charset="0"/>
+                <a:cs typeface="Times New Roman" panose="02020603050405020304" pitchFamily="18" charset="0"/>
+              </a:rPr>
+              <a:t>A_b</a:t>
+            </a:r>
+            <a:endParaRPr lang="zh-CN" altLang="en-US" sz="2400" b="1" dirty="0">
+              <a:latin typeface="Times New Roman" panose="02020603050405020304" pitchFamily="18" charset="0"/>
+              <a:cs typeface="Times New Roman" panose="02020603050405020304" pitchFamily="18" charset="0"/>
+            </a:endParaRPr>
+          </a:p>
+        </p:txBody>
+      </p:sp>
+      <p:cxnSp>
+        <p:nvCxnSpPr>
+          <p:cNvPr id="29" name="直接箭头连接符 28">
+            <a:extLst>
+              <a:ext uri="{FF2B5EF4-FFF2-40B4-BE49-F238E27FC236}">
+                <a16:creationId xmlns:a16="http://schemas.microsoft.com/office/drawing/2014/main" id="{B5BA31C3-A9C3-6532-CFD6-C327C582C425}"/>
+              </a:ext>
+            </a:extLst>
+          </p:cNvPr>
+          <p:cNvCxnSpPr>
+            <a:cxnSpLocks/>
+          </p:cNvCxnSpPr>
+          <p:nvPr/>
+        </p:nvCxnSpPr>
+        <p:spPr>
+          <a:xfrm>
+            <a:off x="2495550" y="2508250"/>
+            <a:ext cx="1587500" cy="184150"/>
+          </a:xfrm>
+          <a:prstGeom prst="straightConnector1">
+            <a:avLst/>
+          </a:prstGeom>
+          <a:ln>
+            <a:tailEnd type="triangle"/>
+          </a:ln>
+        </p:spPr>
+        <p:style>
+          <a:lnRef idx="2">
+            <a:schemeClr val="dk1"/>
+          </a:lnRef>
+          <a:fillRef idx="0">
+            <a:schemeClr val="dk1"/>
+          </a:fillRef>
+          <a:effectRef idx="1">
+            <a:schemeClr val="dk1"/>
+          </a:effectRef>
+          <a:fontRef idx="minor">
+            <a:schemeClr val="tx1"/>
+          </a:fontRef>
+        </p:style>
+      </p:cxnSp>
+      <p:cxnSp>
+        <p:nvCxnSpPr>
+          <p:cNvPr id="31" name="直接箭头连接符 30">
+            <a:extLst>
+              <a:ext uri="{FF2B5EF4-FFF2-40B4-BE49-F238E27FC236}">
+                <a16:creationId xmlns:a16="http://schemas.microsoft.com/office/drawing/2014/main" id="{BDEA5CA1-5DDC-C1F8-D7D3-23A83A055723}"/>
+              </a:ext>
+            </a:extLst>
+          </p:cNvPr>
+          <p:cNvCxnSpPr>
+            <a:cxnSpLocks/>
+          </p:cNvCxnSpPr>
+          <p:nvPr/>
+        </p:nvCxnSpPr>
+        <p:spPr>
+          <a:xfrm flipH="1" flipV="1">
+            <a:off x="1574800" y="2413000"/>
+            <a:ext cx="920750" cy="95250"/>
+          </a:xfrm>
+          <a:prstGeom prst="straightConnector1">
+            <a:avLst/>
+          </a:prstGeom>
+          <a:ln>
+            <a:tailEnd type="triangle"/>
+          </a:ln>
+        </p:spPr>
+        <p:style>
+          <a:lnRef idx="2">
+            <a:schemeClr val="dk1"/>
+          </a:lnRef>
+          <a:fillRef idx="0">
+            <a:schemeClr val="dk1"/>
+          </a:fillRef>
+          <a:effectRef idx="1">
+            <a:schemeClr val="dk1"/>
+          </a:effectRef>
+          <a:fontRef idx="minor">
+            <a:schemeClr val="tx1"/>
+          </a:fontRef>
+        </p:style>
+      </p:cxnSp>
+      <p:sp>
+        <p:nvSpPr>
+          <p:cNvPr id="35" name="文本框 34">
+            <a:extLst>
+              <a:ext uri="{FF2B5EF4-FFF2-40B4-BE49-F238E27FC236}">
+                <a16:creationId xmlns:a16="http://schemas.microsoft.com/office/drawing/2014/main" id="{36302973-EC07-9020-6231-FDDFDE95952B}"/>
+              </a:ext>
+            </a:extLst>
+          </p:cNvPr>
+          <p:cNvSpPr txBox="1"/>
+          <p:nvPr/>
+        </p:nvSpPr>
+        <p:spPr>
+          <a:xfrm>
+            <a:off x="2568349" y="2170707"/>
+            <a:ext cx="790426" cy="461665"/>
+          </a:xfrm>
+          <a:prstGeom prst="rect">
+            <a:avLst/>
+          </a:prstGeom>
+          <a:noFill/>
+        </p:spPr>
+        <p:txBody>
+          <a:bodyPr wrap="square" rtlCol="0">
+            <a:spAutoFit/>
+          </a:bodyPr>
+          <a:lstStyle/>
+          <a:p>
+            <a:r>
+              <a:rPr lang="en-US" altLang="zh-CN" sz="2400" b="1" dirty="0">
+                <a:latin typeface="Times New Roman" panose="02020603050405020304" pitchFamily="18" charset="0"/>
+                <a:cs typeface="Times New Roman" panose="02020603050405020304" pitchFamily="18" charset="0"/>
+              </a:rPr>
+              <a:t>L</a:t>
+            </a:r>
+            <a:endParaRPr lang="zh-CN" altLang="en-US" sz="2400" b="1" dirty="0">
+              <a:latin typeface="Times New Roman" panose="02020603050405020304" pitchFamily="18" charset="0"/>
+              <a:cs typeface="Times New Roman" panose="02020603050405020304" pitchFamily="18" charset="0"/>
+            </a:endParaRPr>
+          </a:p>
+        </p:txBody>
+      </p:sp>
+    </p:spTree>
+    <p:extLst>
+      <p:ext uri="{BB962C8B-B14F-4D97-AF65-F5344CB8AC3E}">
+        <p14:creationId xmlns:p14="http://schemas.microsoft.com/office/powerpoint/2010/main" val="1110711296"/>
+      </p:ext>
+    </p:extLst>
+  </p:cSld>
+  <p:clrMapOvr>
+    <a:masterClrMapping/>
+  </p:clrMapOvr>
+</p:sld>
+</file>
+
+<file path=ppt/slides/slide6.xml><?xml version="1.0" encoding="utf-8"?>
+<p:sld xmlns:a="http://schemas.openxmlformats.org/drawingml/2006/main" xmlns:r="http://schemas.openxmlformats.org/officeDocument/2006/relationships" xmlns:p="http://schemas.openxmlformats.org/presentationml/2006/main">
+  <p:cSld>
+    <p:spTree>
+      <p:nvGrpSpPr>
+        <p:cNvPr id="1" name=""/>
+        <p:cNvGrpSpPr/>
+        <p:nvPr/>
+      </p:nvGrpSpPr>
+      <p:grpSpPr>
+        <a:xfrm>
+          <a:off x="0" y="0"/>
+          <a:ext cx="0" cy="0"/>
+          <a:chOff x="0" y="0"/>
+          <a:chExt cx="0" cy="0"/>
+        </a:xfrm>
+      </p:grpSpPr>
+      <p:pic>
+        <p:nvPicPr>
+          <p:cNvPr id="4" name="图片 3" descr="图表&#10;&#10;AI 生成的内容可能不正确。">
+            <a:extLst>
+              <a:ext uri="{FF2B5EF4-FFF2-40B4-BE49-F238E27FC236}">
+                <a16:creationId xmlns:a16="http://schemas.microsoft.com/office/drawing/2014/main" id="{43FB86FC-B56E-1513-02DA-FE649C060D52}"/>
+              </a:ext>
+            </a:extLst>
+          </p:cNvPr>
+          <p:cNvPicPr>
+            <a:picLocks noChangeAspect="1"/>
+          </p:cNvPicPr>
+          <p:nvPr/>
+        </p:nvPicPr>
+        <p:blipFill>
+          <a:blip r:embed="rId2"/>
+          <a:stretch>
+            <a:fillRect/>
+          </a:stretch>
+        </p:blipFill>
+        <p:spPr>
+          <a:xfrm>
+            <a:off x="509539" y="725856"/>
+            <a:ext cx="7307312" cy="4843094"/>
+          </a:xfrm>
+          <a:prstGeom prst="rect">
+            <a:avLst/>
+          </a:prstGeom>
+        </p:spPr>
+      </p:pic>
+      <p:grpSp>
+        <p:nvGrpSpPr>
+          <p:cNvPr id="6" name="组合 5">
+            <a:extLst>
+              <a:ext uri="{FF2B5EF4-FFF2-40B4-BE49-F238E27FC236}">
+                <a16:creationId xmlns:a16="http://schemas.microsoft.com/office/drawing/2014/main" id="{B0E505D8-880B-3DF7-4D75-FD275697ED64}"/>
+              </a:ext>
+            </a:extLst>
+          </p:cNvPr>
+          <p:cNvGrpSpPr/>
+          <p:nvPr/>
+        </p:nvGrpSpPr>
+        <p:grpSpPr>
+          <a:xfrm>
+            <a:off x="6457950" y="1016000"/>
+            <a:ext cx="4845050" cy="2978150"/>
+            <a:chOff x="114301" y="1581150"/>
+            <a:chExt cx="5363157" cy="3530600"/>
+          </a:xfrm>
+        </p:grpSpPr>
+        <p:pic>
+          <p:nvPicPr>
+            <p:cNvPr id="3" name="图片 2" descr="图形用户界面&#10;&#10;AI 生成的内容可能不正确。">
+              <a:extLst>
+                <a:ext uri="{FF2B5EF4-FFF2-40B4-BE49-F238E27FC236}">
+                  <a16:creationId xmlns:a16="http://schemas.microsoft.com/office/drawing/2014/main" id="{303DAED3-D727-F421-88A2-93C122A5079C}"/>
+                </a:ext>
+              </a:extLst>
+            </p:cNvPr>
+            <p:cNvPicPr>
+              <a:picLocks noChangeAspect="1"/>
+            </p:cNvPicPr>
+            <p:nvPr/>
+          </p:nvPicPr>
+          <p:blipFill>
+            <a:blip r:embed="rId3"/>
+            <a:stretch>
+              <a:fillRect/>
+            </a:stretch>
+          </p:blipFill>
+          <p:spPr>
+            <a:xfrm>
+              <a:off x="198356" y="1612900"/>
+              <a:ext cx="5279102" cy="3498850"/>
+            </a:xfrm>
+            <a:prstGeom prst="rect">
+              <a:avLst/>
+            </a:prstGeom>
+          </p:spPr>
+        </p:pic>
+        <p:pic>
+          <p:nvPicPr>
+            <p:cNvPr id="7" name="图片 6" descr="图片包含 形状&#10;&#10;AI 生成的内容可能不正确。">
+              <a:extLst>
+                <a:ext uri="{FF2B5EF4-FFF2-40B4-BE49-F238E27FC236}">
+                  <a16:creationId xmlns:a16="http://schemas.microsoft.com/office/drawing/2014/main" id="{E0AD2333-72C9-C1B7-F0B2-812E93A65CE2}"/>
+                </a:ext>
+              </a:extLst>
+            </p:cNvPr>
+            <p:cNvPicPr>
+              <a:picLocks noChangeAspect="1"/>
+            </p:cNvPicPr>
+            <p:nvPr/>
+          </p:nvPicPr>
+          <p:blipFill>
+            <a:blip r:embed="rId4"/>
+            <a:stretch>
+              <a:fillRect/>
+            </a:stretch>
+          </p:blipFill>
+          <p:spPr>
+            <a:xfrm>
+              <a:off x="114301" y="1581150"/>
+              <a:ext cx="5279102" cy="3467100"/>
+            </a:xfrm>
+            <a:prstGeom prst="rect">
+              <a:avLst/>
+            </a:prstGeom>
+          </p:spPr>
+        </p:pic>
+      </p:grpSp>
+      <p:cxnSp>
+        <p:nvCxnSpPr>
+          <p:cNvPr id="5" name="直接连接符 4">
+            <a:extLst>
+              <a:ext uri="{FF2B5EF4-FFF2-40B4-BE49-F238E27FC236}">
+                <a16:creationId xmlns:a16="http://schemas.microsoft.com/office/drawing/2014/main" id="{63C99806-87FE-78E3-6B7A-218E8CBAD0B6}"/>
+              </a:ext>
+            </a:extLst>
+          </p:cNvPr>
+          <p:cNvCxnSpPr/>
+          <p:nvPr/>
+        </p:nvCxnSpPr>
+        <p:spPr>
+          <a:xfrm flipH="1">
+            <a:off x="1689100" y="812800"/>
+            <a:ext cx="2851150" cy="4311650"/>
+          </a:xfrm>
+          <a:prstGeom prst="line">
+            <a:avLst/>
+          </a:prstGeom>
+          <a:ln>
+            <a:prstDash val="dash"/>
+          </a:ln>
+        </p:spPr>
+        <p:style>
+          <a:lnRef idx="2">
+            <a:schemeClr val="accent1"/>
+          </a:lnRef>
+          <a:fillRef idx="0">
+            <a:schemeClr val="accent1"/>
+          </a:fillRef>
+          <a:effectRef idx="1">
+            <a:schemeClr val="accent1"/>
+          </a:effectRef>
+          <a:fontRef idx="minor">
+            <a:schemeClr val="tx1"/>
+          </a:fontRef>
+        </p:style>
+      </p:cxnSp>
+      <p:cxnSp>
+        <p:nvCxnSpPr>
+          <p:cNvPr id="8" name="直接连接符 7">
+            <a:extLst>
+              <a:ext uri="{FF2B5EF4-FFF2-40B4-BE49-F238E27FC236}">
+                <a16:creationId xmlns:a16="http://schemas.microsoft.com/office/drawing/2014/main" id="{44E45AD4-C691-A782-9458-BEFE5104D437}"/>
+              </a:ext>
+            </a:extLst>
+          </p:cNvPr>
+          <p:cNvCxnSpPr>
+            <a:cxnSpLocks/>
+          </p:cNvCxnSpPr>
+          <p:nvPr/>
+        </p:nvCxnSpPr>
+        <p:spPr>
+          <a:xfrm>
+            <a:off x="4540250" y="812800"/>
+            <a:ext cx="2844800" cy="4311650"/>
+          </a:xfrm>
+          <a:prstGeom prst="line">
+            <a:avLst/>
+          </a:prstGeom>
+          <a:ln>
+            <a:prstDash val="dash"/>
+          </a:ln>
+        </p:spPr>
+        <p:style>
+          <a:lnRef idx="2">
+            <a:schemeClr val="accent1"/>
+          </a:lnRef>
+          <a:fillRef idx="0">
+            <a:schemeClr val="accent1"/>
+          </a:fillRef>
+          <a:effectRef idx="1">
+            <a:schemeClr val="accent1"/>
+          </a:effectRef>
+          <a:fontRef idx="minor">
+            <a:schemeClr val="tx1"/>
+          </a:fontRef>
+        </p:style>
+      </p:cxnSp>
+    </p:spTree>
+    <p:extLst>
+      <p:ext uri="{BB962C8B-B14F-4D97-AF65-F5344CB8AC3E}">
+        <p14:creationId xmlns:p14="http://schemas.microsoft.com/office/powerpoint/2010/main" val="3388954506"/>
       </p:ext>
     </p:extLst>
   </p:cSld>
